--- a/labs/39-bloom-filters/result/linkedin/lab-39-bloom-filters-carousel.pptx
+++ b/labs/39-bloom-filters/result/linkedin/lab-39-bloom-filters-carousel.pptx
@@ -6937,63 +6937,35 @@
       </p:sp>
       <p:sp>
         <p:nvSpPr>
-          <p:cNvPr id="6" name="Rounded Rectangle 5"/>
-          <p:cNvSpPr/>
-          <p:nvPr/>
-        </p:nvSpPr>
-        <p:spPr>
-          <a:xfrm>
-            <a:off x="914400" y="4389120"/>
-            <a:ext cx="10362895" cy="1645920"/>
-          </a:xfrm>
-          <a:prstGeom prst="roundRect">
-            <a:avLst/>
-          </a:prstGeom>
-          <a:solidFill>
-            <a:srgbClr val="1E293B"/>
-          </a:solidFill>
-          <a:ln>
-            <a:solidFill>
-              <a:srgbClr val="087F76"/>
-            </a:solidFill>
-          </a:ln>
-        </p:spPr>
-        <p:style>
-          <a:lnRef idx="1">
-            <a:schemeClr val="accent1"/>
-          </a:lnRef>
-          <a:fillRef idx="3">
-            <a:schemeClr val="accent1"/>
-          </a:fillRef>
-          <a:effectRef idx="2">
-            <a:schemeClr val="accent1"/>
-          </a:effectRef>
-          <a:fontRef idx="minor">
-            <a:schemeClr val="lt1"/>
-          </a:fontRef>
-        </p:style>
-        <p:txBody>
-          <a:bodyPr rtlCol="0" anchor="ctr" wrap="square"/>
-          <a:lstStyle/>
-          <a:p>
-            <a:pPr algn="ctr">
-              <a:defRPr sz="1500">
-                <a:solidFill>
-                  <a:srgbClr val="087F76"/>
-                </a:solidFill>
-                <a:latin typeface="Courier New"/>
-              </a:defRPr>
-            </a:pPr>
-            <a:r>
-              <a:t>&gt; system_check --lab 39 --topic 'bloom-filters'</a:t>
-            </a:r>
-            <a:br/>
-            <a:r>
-              <a:t>&gt; author: Lukman / lukman-ss | status: PRODUCTION VERIFIED</a:t>
-            </a:r>
-            <a:br/>
-            <a:r>
-              <a:t>&gt; commit: c977525a | tests: PASS</a:t>
+          <p:cNvPr id="6" name="TextBox 5"/>
+          <p:cNvSpPr txBox="1"/>
+          <p:nvPr/>
+        </p:nvSpPr>
+        <p:spPr>
+          <a:xfrm>
+            <a:off x="914400" y="5303520"/>
+            <a:ext cx="5486400" cy="548640"/>
+          </a:xfrm>
+          <a:prstGeom prst="rect">
+            <a:avLst/>
+          </a:prstGeom>
+          <a:noFill/>
+        </p:spPr>
+        <p:txBody>
+          <a:bodyPr wrap="none">
+            <a:spAutoFit/>
+          </a:bodyPr>
+          <a:lstStyle/>
+          <a:p>
+            <a:pPr>
+              <a:defRPr sz="1800" b="1">
+                <a:solidFill>
+                  <a:srgbClr val="D97706"/>
+                </a:solidFill>
+              </a:defRPr>
+            </a:pPr>
+            <a:r>
+              <a:t>Lukman / lukman-ss</a:t>
             </a:r>
           </a:p>
         </p:txBody>
@@ -7996,7 +7968,7 @@
         </p:nvGraphicFramePr>
         <p:xfrm>
           <a:off x="731520" y="1828800"/>
-          <a:ext cx="5120640" cy="2743200"/>
+          <a:ext cx="5120640" cy="2468880"/>
         </p:xfrm>
         <a:graphic>
           <a:graphicData uri="http://schemas.openxmlformats.org/drawingml/2006/table">
@@ -8009,14 +7981,14 @@
                 <a:gridCol w="1706880"/>
                 <a:gridCol w="1706880"/>
               </a:tblGrid>
-              <a:tr h="457200">
+              <a:tr h="411480">
                 <a:tc>
                   <a:txBody>
                     <a:bodyPr/>
                     <a:lstStyle/>
                     <a:p>
                       <a:pPr>
-                        <a:defRPr b="1" sz="1100">
+                        <a:defRPr b="1" sz="1000">
                           <a:solidFill>
                             <a:srgbClr val="FFFFFF"/>
                           </a:solidFill>
@@ -8039,7 +8011,7 @@
                     <a:lstStyle/>
                     <a:p>
                       <a:pPr>
-                        <a:defRPr b="1" sz="1100">
+                        <a:defRPr b="1" sz="1000">
                           <a:solidFill>
                             <a:srgbClr val="FFFFFF"/>
                           </a:solidFill>
@@ -8062,7 +8034,7 @@
                     <a:lstStyle/>
                     <a:p>
                       <a:pPr>
-                        <a:defRPr b="1" sz="1100">
+                        <a:defRPr b="1" sz="1000">
                           <a:solidFill>
                             <a:srgbClr val="FFFFFF"/>
                           </a:solidFill>
@@ -8080,14 +8052,14 @@
                   </a:tcPr>
                 </a:tc>
               </a:tr>
-              <a:tr h="457200">
+              <a:tr h="411480">
                 <a:tc>
                   <a:txBody>
                     <a:bodyPr/>
                     <a:lstStyle/>
                     <a:p>
                       <a:pPr>
-                        <a:defRPr sz="1000">
+                        <a:defRPr sz="900">
                           <a:solidFill>
                             <a:srgbClr val="0B1B2D"/>
                           </a:solidFill>
@@ -8110,7 +8082,7 @@
                     <a:lstStyle/>
                     <a:p>
                       <a:pPr>
-                        <a:defRPr sz="1000">
+                        <a:defRPr sz="900">
                           <a:solidFill>
                             <a:srgbClr val="0B1B2D"/>
                           </a:solidFill>
@@ -8133,7 +8105,7 @@
                     <a:lstStyle/>
                     <a:p>
                       <a:pPr>
-                        <a:defRPr sz="1000">
+                        <a:defRPr sz="900">
                           <a:solidFill>
                             <a:srgbClr val="0B1B2D"/>
                           </a:solidFill>
@@ -8151,14 +8123,14 @@
                   </a:tcPr>
                 </a:tc>
               </a:tr>
-              <a:tr h="457200">
+              <a:tr h="411480">
                 <a:tc>
                   <a:txBody>
                     <a:bodyPr/>
                     <a:lstStyle/>
                     <a:p>
                       <a:pPr>
-                        <a:defRPr sz="1000">
+                        <a:defRPr sz="900">
                           <a:solidFill>
                             <a:srgbClr val="0B1B2D"/>
                           </a:solidFill>
@@ -8181,7 +8153,7 @@
                     <a:lstStyle/>
                     <a:p>
                       <a:pPr>
-                        <a:defRPr sz="1000">
+                        <a:defRPr sz="900">
                           <a:solidFill>
                             <a:srgbClr val="0B1B2D"/>
                           </a:solidFill>
@@ -8204,7 +8176,7 @@
                     <a:lstStyle/>
                     <a:p>
                       <a:pPr>
-                        <a:defRPr sz="1000">
+                        <a:defRPr sz="900">
                           <a:solidFill>
                             <a:srgbClr val="0B1B2D"/>
                           </a:solidFill>
@@ -8222,14 +8194,14 @@
                   </a:tcPr>
                 </a:tc>
               </a:tr>
-              <a:tr h="457200">
+              <a:tr h="411480">
                 <a:tc>
                   <a:txBody>
                     <a:bodyPr/>
                     <a:lstStyle/>
                     <a:p>
                       <a:pPr>
-                        <a:defRPr sz="1000">
+                        <a:defRPr sz="900">
                           <a:solidFill>
                             <a:srgbClr val="0B1B2D"/>
                           </a:solidFill>
@@ -8252,7 +8224,7 @@
                     <a:lstStyle/>
                     <a:p>
                       <a:pPr>
-                        <a:defRPr sz="1000">
+                        <a:defRPr sz="900">
                           <a:solidFill>
                             <a:srgbClr val="0B1B2D"/>
                           </a:solidFill>
@@ -8275,7 +8247,7 @@
                     <a:lstStyle/>
                     <a:p>
                       <a:pPr>
-                        <a:defRPr sz="1000">
+                        <a:defRPr sz="900">
                           <a:solidFill>
                             <a:srgbClr val="0B1B2D"/>
                           </a:solidFill>
@@ -8293,14 +8265,14 @@
                   </a:tcPr>
                 </a:tc>
               </a:tr>
-              <a:tr h="457200">
+              <a:tr h="411480">
                 <a:tc>
                   <a:txBody>
                     <a:bodyPr/>
                     <a:lstStyle/>
                     <a:p>
                       <a:pPr>
-                        <a:defRPr sz="1000">
+                        <a:defRPr sz="900">
                           <a:solidFill>
                             <a:srgbClr val="0B1B2D"/>
                           </a:solidFill>
@@ -8323,7 +8295,7 @@
                     <a:lstStyle/>
                     <a:p>
                       <a:pPr>
-                        <a:defRPr sz="1000">
+                        <a:defRPr sz="900">
                           <a:solidFill>
                             <a:srgbClr val="0B1B2D"/>
                           </a:solidFill>
@@ -8346,7 +8318,7 @@
                     <a:lstStyle/>
                     <a:p>
                       <a:pPr>
-                        <a:defRPr sz="1000">
+                        <a:defRPr sz="900">
                           <a:solidFill>
                             <a:srgbClr val="0B1B2D"/>
                           </a:solidFill>
@@ -8364,14 +8336,14 @@
                   </a:tcPr>
                 </a:tc>
               </a:tr>
-              <a:tr h="457200">
+              <a:tr h="411480">
                 <a:tc>
                   <a:txBody>
                     <a:bodyPr/>
                     <a:lstStyle/>
                     <a:p>
                       <a:pPr>
-                        <a:defRPr sz="1000">
+                        <a:defRPr sz="900">
                           <a:solidFill>
                             <a:srgbClr val="0B1B2D"/>
                           </a:solidFill>
@@ -8394,7 +8366,7 @@
                     <a:lstStyle/>
                     <a:p>
                       <a:pPr>
-                        <a:defRPr sz="1000">
+                        <a:defRPr sz="900">
                           <a:solidFill>
                             <a:srgbClr val="0B1B2D"/>
                           </a:solidFill>
@@ -8417,7 +8389,7 @@
                     <a:lstStyle/>
                     <a:p>
                       <a:pPr>
-                        <a:defRPr sz="1000">
+                        <a:defRPr sz="900">
                           <a:solidFill>
                             <a:srgbClr val="0B1B2D"/>
                           </a:solidFill>
@@ -10086,7 +10058,7 @@
         </p:nvGraphicFramePr>
         <p:xfrm>
           <a:off x="731520" y="1828800"/>
-          <a:ext cx="5120640" cy="2286000"/>
+          <a:ext cx="5120640" cy="2057400"/>
         </p:xfrm>
         <a:graphic>
           <a:graphicData uri="http://schemas.openxmlformats.org/drawingml/2006/table">
@@ -10100,14 +10072,14 @@
                 <a:gridCol w="1280160"/>
                 <a:gridCol w="1280160"/>
               </a:tblGrid>
-              <a:tr h="457200">
+              <a:tr h="411480">
                 <a:tc>
                   <a:txBody>
                     <a:bodyPr/>
                     <a:lstStyle/>
                     <a:p>
                       <a:pPr>
-                        <a:defRPr b="1" sz="1100">
+                        <a:defRPr b="1" sz="1000">
                           <a:solidFill>
                             <a:srgbClr val="FFFFFF"/>
                           </a:solidFill>
@@ -10130,7 +10102,7 @@
                     <a:lstStyle/>
                     <a:p>
                       <a:pPr>
-                        <a:defRPr b="1" sz="1100">
+                        <a:defRPr b="1" sz="1000">
                           <a:solidFill>
                             <a:srgbClr val="FFFFFF"/>
                           </a:solidFill>
@@ -10153,7 +10125,7 @@
                     <a:lstStyle/>
                     <a:p>
                       <a:pPr>
-                        <a:defRPr b="1" sz="1100">
+                        <a:defRPr b="1" sz="1000">
                           <a:solidFill>
                             <a:srgbClr val="FFFFFF"/>
                           </a:solidFill>
@@ -10176,7 +10148,7 @@
                     <a:lstStyle/>
                     <a:p>
                       <a:pPr>
-                        <a:defRPr b="1" sz="1100">
+                        <a:defRPr b="1" sz="1000">
                           <a:solidFill>
                             <a:srgbClr val="FFFFFF"/>
                           </a:solidFill>
@@ -10194,14 +10166,14 @@
                   </a:tcPr>
                 </a:tc>
               </a:tr>
-              <a:tr h="457200">
+              <a:tr h="411480">
                 <a:tc>
                   <a:txBody>
                     <a:bodyPr/>
                     <a:lstStyle/>
                     <a:p>
                       <a:pPr>
-                        <a:defRPr sz="1000">
+                        <a:defRPr sz="900">
                           <a:solidFill>
                             <a:srgbClr val="0B1B2D"/>
                           </a:solidFill>
@@ -10224,7 +10196,7 @@
                     <a:lstStyle/>
                     <a:p>
                       <a:pPr>
-                        <a:defRPr sz="1000">
+                        <a:defRPr sz="900">
                           <a:solidFill>
                             <a:srgbClr val="0B1B2D"/>
                           </a:solidFill>
@@ -10247,7 +10219,7 @@
                     <a:lstStyle/>
                     <a:p>
                       <a:pPr>
-                        <a:defRPr sz="1000">
+                        <a:defRPr sz="900">
                           <a:solidFill>
                             <a:srgbClr val="0B1B2D"/>
                           </a:solidFill>
@@ -10270,7 +10242,7 @@
                     <a:lstStyle/>
                     <a:p>
                       <a:pPr>
-                        <a:defRPr sz="1000">
+                        <a:defRPr sz="900">
                           <a:solidFill>
                             <a:srgbClr val="0B1B2D"/>
                           </a:solidFill>
@@ -10288,14 +10260,14 @@
                   </a:tcPr>
                 </a:tc>
               </a:tr>
-              <a:tr h="457200">
+              <a:tr h="411480">
                 <a:tc>
                   <a:txBody>
                     <a:bodyPr/>
                     <a:lstStyle/>
                     <a:p>
                       <a:pPr>
-                        <a:defRPr sz="1000">
+                        <a:defRPr sz="900">
                           <a:solidFill>
                             <a:srgbClr val="0B1B2D"/>
                           </a:solidFill>
@@ -10318,7 +10290,7 @@
                     <a:lstStyle/>
                     <a:p>
                       <a:pPr>
-                        <a:defRPr sz="1000">
+                        <a:defRPr sz="900">
                           <a:solidFill>
                             <a:srgbClr val="0B1B2D"/>
                           </a:solidFill>
@@ -10341,7 +10313,7 @@
                     <a:lstStyle/>
                     <a:p>
                       <a:pPr>
-                        <a:defRPr sz="1000">
+                        <a:defRPr sz="900">
                           <a:solidFill>
                             <a:srgbClr val="0B1B2D"/>
                           </a:solidFill>
@@ -10364,7 +10336,7 @@
                     <a:lstStyle/>
                     <a:p>
                       <a:pPr>
-                        <a:defRPr sz="1000">
+                        <a:defRPr sz="900">
                           <a:solidFill>
                             <a:srgbClr val="0B1B2D"/>
                           </a:solidFill>
@@ -10382,14 +10354,14 @@
                   </a:tcPr>
                 </a:tc>
               </a:tr>
-              <a:tr h="457200">
+              <a:tr h="411480">
                 <a:tc>
                   <a:txBody>
                     <a:bodyPr/>
                     <a:lstStyle/>
                     <a:p>
                       <a:pPr>
-                        <a:defRPr sz="1000">
+                        <a:defRPr sz="900">
                           <a:solidFill>
                             <a:srgbClr val="0B1B2D"/>
                           </a:solidFill>
@@ -10412,7 +10384,7 @@
                     <a:lstStyle/>
                     <a:p>
                       <a:pPr>
-                        <a:defRPr sz="1000">
+                        <a:defRPr sz="900">
                           <a:solidFill>
                             <a:srgbClr val="0B1B2D"/>
                           </a:solidFill>
@@ -10435,7 +10407,7 @@
                     <a:lstStyle/>
                     <a:p>
                       <a:pPr>
-                        <a:defRPr sz="1000">
+                        <a:defRPr sz="900">
                           <a:solidFill>
                             <a:srgbClr val="0B1B2D"/>
                           </a:solidFill>
@@ -10458,7 +10430,7 @@
                     <a:lstStyle/>
                     <a:p>
                       <a:pPr>
-                        <a:defRPr sz="1000">
+                        <a:defRPr sz="900">
                           <a:solidFill>
                             <a:srgbClr val="0B1B2D"/>
                           </a:solidFill>
@@ -10476,14 +10448,14 @@
                   </a:tcPr>
                 </a:tc>
               </a:tr>
-              <a:tr h="457200">
+              <a:tr h="411480">
                 <a:tc>
                   <a:txBody>
                     <a:bodyPr/>
                     <a:lstStyle/>
                     <a:p>
                       <a:pPr>
-                        <a:defRPr sz="1000">
+                        <a:defRPr sz="900">
                           <a:solidFill>
                             <a:srgbClr val="0B1B2D"/>
                           </a:solidFill>
@@ -10506,7 +10478,7 @@
                     <a:lstStyle/>
                     <a:p>
                       <a:pPr>
-                        <a:defRPr sz="1000">
+                        <a:defRPr sz="900">
                           <a:solidFill>
                             <a:srgbClr val="0B1B2D"/>
                           </a:solidFill>
@@ -10529,7 +10501,7 @@
                     <a:lstStyle/>
                     <a:p>
                       <a:pPr>
-                        <a:defRPr sz="1000">
+                        <a:defRPr sz="900">
                           <a:solidFill>
                             <a:srgbClr val="0B1B2D"/>
                           </a:solidFill>
@@ -10552,7 +10524,7 @@
                     <a:lstStyle/>
                     <a:p>
                       <a:pPr>
-                        <a:defRPr sz="1000">
+                        <a:defRPr sz="900">
                           <a:solidFill>
                             <a:srgbClr val="0B1B2D"/>
                           </a:solidFill>
@@ -11309,7 +11281,7 @@
         </p:nvGraphicFramePr>
         <p:xfrm>
           <a:off x="731520" y="1828800"/>
-          <a:ext cx="5120640" cy="2286000"/>
+          <a:ext cx="5120640" cy="2057400"/>
         </p:xfrm>
         <a:graphic>
           <a:graphicData uri="http://schemas.openxmlformats.org/drawingml/2006/table">
@@ -11324,14 +11296,14 @@
                 <a:gridCol w="1024128"/>
                 <a:gridCol w="1024128"/>
               </a:tblGrid>
-              <a:tr h="457200">
+              <a:tr h="411480">
                 <a:tc>
                   <a:txBody>
                     <a:bodyPr/>
                     <a:lstStyle/>
                     <a:p>
                       <a:pPr>
-                        <a:defRPr b="1" sz="1100">
+                        <a:defRPr b="1" sz="1000">
                           <a:solidFill>
                             <a:srgbClr val="FFFFFF"/>
                           </a:solidFill>
@@ -11354,7 +11326,7 @@
                     <a:lstStyle/>
                     <a:p>
                       <a:pPr>
-                        <a:defRPr b="1" sz="1100">
+                        <a:defRPr b="1" sz="1000">
                           <a:solidFill>
                             <a:srgbClr val="FFFFFF"/>
                           </a:solidFill>
@@ -11377,7 +11349,7 @@
                     <a:lstStyle/>
                     <a:p>
                       <a:pPr>
-                        <a:defRPr b="1" sz="1100">
+                        <a:defRPr b="1" sz="1000">
                           <a:solidFill>
                             <a:srgbClr val="FFFFFF"/>
                           </a:solidFill>
@@ -11400,7 +11372,7 @@
                     <a:lstStyle/>
                     <a:p>
                       <a:pPr>
-                        <a:defRPr b="1" sz="1100">
+                        <a:defRPr b="1" sz="1000">
                           <a:solidFill>
                             <a:srgbClr val="FFFFFF"/>
                           </a:solidFill>
@@ -11423,7 +11395,7 @@
                     <a:lstStyle/>
                     <a:p>
                       <a:pPr>
-                        <a:defRPr b="1" sz="1100">
+                        <a:defRPr b="1" sz="1000">
                           <a:solidFill>
                             <a:srgbClr val="FFFFFF"/>
                           </a:solidFill>
@@ -11441,14 +11413,14 @@
                   </a:tcPr>
                 </a:tc>
               </a:tr>
-              <a:tr h="457200">
+              <a:tr h="411480">
                 <a:tc>
                   <a:txBody>
                     <a:bodyPr/>
                     <a:lstStyle/>
                     <a:p>
                       <a:pPr>
-                        <a:defRPr sz="1000">
+                        <a:defRPr sz="900">
                           <a:solidFill>
                             <a:srgbClr val="0B1B2D"/>
                           </a:solidFill>
@@ -11471,7 +11443,7 @@
                     <a:lstStyle/>
                     <a:p>
                       <a:pPr>
-                        <a:defRPr sz="1000">
+                        <a:defRPr sz="900">
                           <a:solidFill>
                             <a:srgbClr val="0B1B2D"/>
                           </a:solidFill>
@@ -11494,7 +11466,7 @@
                     <a:lstStyle/>
                     <a:p>
                       <a:pPr>
-                        <a:defRPr sz="1000">
+                        <a:defRPr sz="900">
                           <a:solidFill>
                             <a:srgbClr val="0B1B2D"/>
                           </a:solidFill>
@@ -11517,7 +11489,7 @@
                     <a:lstStyle/>
                     <a:p>
                       <a:pPr>
-                        <a:defRPr sz="1000">
+                        <a:defRPr sz="900">
                           <a:solidFill>
                             <a:srgbClr val="0B1B2D"/>
                           </a:solidFill>
@@ -11540,7 +11512,7 @@
                     <a:lstStyle/>
                     <a:p>
                       <a:pPr>
-                        <a:defRPr sz="1000">
+                        <a:defRPr sz="900">
                           <a:solidFill>
                             <a:srgbClr val="0B1B2D"/>
                           </a:solidFill>
@@ -11558,14 +11530,14 @@
                   </a:tcPr>
                 </a:tc>
               </a:tr>
-              <a:tr h="457200">
+              <a:tr h="411480">
                 <a:tc>
                   <a:txBody>
                     <a:bodyPr/>
                     <a:lstStyle/>
                     <a:p>
                       <a:pPr>
-                        <a:defRPr sz="1000">
+                        <a:defRPr sz="900">
                           <a:solidFill>
                             <a:srgbClr val="0B1B2D"/>
                           </a:solidFill>
@@ -11588,7 +11560,7 @@
                     <a:lstStyle/>
                     <a:p>
                       <a:pPr>
-                        <a:defRPr sz="1000">
+                        <a:defRPr sz="900">
                           <a:solidFill>
                             <a:srgbClr val="0B1B2D"/>
                           </a:solidFill>
@@ -11611,7 +11583,7 @@
                     <a:lstStyle/>
                     <a:p>
                       <a:pPr>
-                        <a:defRPr sz="1000">
+                        <a:defRPr sz="900">
                           <a:solidFill>
                             <a:srgbClr val="0B1B2D"/>
                           </a:solidFill>
@@ -11634,7 +11606,7 @@
                     <a:lstStyle/>
                     <a:p>
                       <a:pPr>
-                        <a:defRPr sz="1000">
+                        <a:defRPr sz="900">
                           <a:solidFill>
                             <a:srgbClr val="0B1B2D"/>
                           </a:solidFill>
@@ -11657,7 +11629,7 @@
                     <a:lstStyle/>
                     <a:p>
                       <a:pPr>
-                        <a:defRPr sz="1000">
+                        <a:defRPr sz="900">
                           <a:solidFill>
                             <a:srgbClr val="0B1B2D"/>
                           </a:solidFill>
@@ -11675,14 +11647,14 @@
                   </a:tcPr>
                 </a:tc>
               </a:tr>
-              <a:tr h="457200">
+              <a:tr h="411480">
                 <a:tc>
                   <a:txBody>
                     <a:bodyPr/>
                     <a:lstStyle/>
                     <a:p>
                       <a:pPr>
-                        <a:defRPr sz="1000">
+                        <a:defRPr sz="900">
                           <a:solidFill>
                             <a:srgbClr val="0B1B2D"/>
                           </a:solidFill>
@@ -11705,7 +11677,7 @@
                     <a:lstStyle/>
                     <a:p>
                       <a:pPr>
-                        <a:defRPr sz="1000">
+                        <a:defRPr sz="900">
                           <a:solidFill>
                             <a:srgbClr val="0B1B2D"/>
                           </a:solidFill>
@@ -11728,7 +11700,7 @@
                     <a:lstStyle/>
                     <a:p>
                       <a:pPr>
-                        <a:defRPr sz="1000">
+                        <a:defRPr sz="900">
                           <a:solidFill>
                             <a:srgbClr val="0B1B2D"/>
                           </a:solidFill>
@@ -11751,7 +11723,7 @@
                     <a:lstStyle/>
                     <a:p>
                       <a:pPr>
-                        <a:defRPr sz="1000">
+                        <a:defRPr sz="900">
                           <a:solidFill>
                             <a:srgbClr val="0B1B2D"/>
                           </a:solidFill>
@@ -11774,7 +11746,7 @@
                     <a:lstStyle/>
                     <a:p>
                       <a:pPr>
-                        <a:defRPr sz="1000">
+                        <a:defRPr sz="900">
                           <a:solidFill>
                             <a:srgbClr val="0B1B2D"/>
                           </a:solidFill>
@@ -11792,14 +11764,14 @@
                   </a:tcPr>
                 </a:tc>
               </a:tr>
-              <a:tr h="457200">
+              <a:tr h="411480">
                 <a:tc>
                   <a:txBody>
                     <a:bodyPr/>
                     <a:lstStyle/>
                     <a:p>
                       <a:pPr>
-                        <a:defRPr sz="1000">
+                        <a:defRPr sz="900">
                           <a:solidFill>
                             <a:srgbClr val="0B1B2D"/>
                           </a:solidFill>
@@ -11822,7 +11794,7 @@
                     <a:lstStyle/>
                     <a:p>
                       <a:pPr>
-                        <a:defRPr sz="1000">
+                        <a:defRPr sz="900">
                           <a:solidFill>
                             <a:srgbClr val="0B1B2D"/>
                           </a:solidFill>
@@ -11845,7 +11817,7 @@
                     <a:lstStyle/>
                     <a:p>
                       <a:pPr>
-                        <a:defRPr sz="1000">
+                        <a:defRPr sz="900">
                           <a:solidFill>
                             <a:srgbClr val="0B1B2D"/>
                           </a:solidFill>
@@ -11868,7 +11840,7 @@
                     <a:lstStyle/>
                     <a:p>
                       <a:pPr>
-                        <a:defRPr sz="1000">
+                        <a:defRPr sz="900">
                           <a:solidFill>
                             <a:srgbClr val="0B1B2D"/>
                           </a:solidFill>
@@ -11891,7 +11863,7 @@
                     <a:lstStyle/>
                     <a:p>
                       <a:pPr>
-                        <a:defRPr sz="1000">
+                        <a:defRPr sz="900">
                           <a:solidFill>
                             <a:srgbClr val="0B1B2D"/>
                           </a:solidFill>
@@ -15193,7 +15165,11 @@
               </a:defRPr>
             </a:pPr>
             <a:r>
-              <a:t>github.com/lukman-ss/software-engineering-lab/tree/main/labs/39-bloom-filters</a:t>
+              <a:t>github.com/lukman-ss/software-engineering-lab</a:t>
+            </a:r>
+            <a:br/>
+            <a:r>
+              <a:t>labs/39-bloom-filters</a:t>
             </a:r>
           </a:p>
         </p:txBody>
@@ -16020,7 +15996,7 @@
         </p:nvGraphicFramePr>
         <p:xfrm>
           <a:off x="731520" y="1828800"/>
-          <a:ext cx="5120640" cy="1828800"/>
+          <a:ext cx="5120640" cy="1645920"/>
         </p:xfrm>
         <a:graphic>
           <a:graphicData uri="http://schemas.openxmlformats.org/drawingml/2006/table">
@@ -16033,14 +16009,14 @@
                 <a:gridCol w="1706880"/>
                 <a:gridCol w="1706880"/>
               </a:tblGrid>
-              <a:tr h="457200">
+              <a:tr h="411480">
                 <a:tc>
                   <a:txBody>
                     <a:bodyPr/>
                     <a:lstStyle/>
                     <a:p>
                       <a:pPr>
-                        <a:defRPr b="1" sz="1100">
+                        <a:defRPr b="1" sz="1000">
                           <a:solidFill>
                             <a:srgbClr val="FFFFFF"/>
                           </a:solidFill>
@@ -16063,7 +16039,7 @@
                     <a:lstStyle/>
                     <a:p>
                       <a:pPr>
-                        <a:defRPr b="1" sz="1100">
+                        <a:defRPr b="1" sz="1000">
                           <a:solidFill>
                             <a:srgbClr val="FFFFFF"/>
                           </a:solidFill>
@@ -16086,7 +16062,7 @@
                     <a:lstStyle/>
                     <a:p>
                       <a:pPr>
-                        <a:defRPr b="1" sz="1100">
+                        <a:defRPr b="1" sz="1000">
                           <a:solidFill>
                             <a:srgbClr val="FFFFFF"/>
                           </a:solidFill>
@@ -16104,14 +16080,14 @@
                   </a:tcPr>
                 </a:tc>
               </a:tr>
-              <a:tr h="457200">
+              <a:tr h="411480">
                 <a:tc>
                   <a:txBody>
                     <a:bodyPr/>
                     <a:lstStyle/>
                     <a:p>
                       <a:pPr>
-                        <a:defRPr sz="1000">
+                        <a:defRPr sz="900">
                           <a:solidFill>
                             <a:srgbClr val="0B1B2D"/>
                           </a:solidFill>
@@ -16134,7 +16110,7 @@
                     <a:lstStyle/>
                     <a:p>
                       <a:pPr>
-                        <a:defRPr sz="1000">
+                        <a:defRPr sz="900">
                           <a:solidFill>
                             <a:srgbClr val="0B1B2D"/>
                           </a:solidFill>
@@ -16157,7 +16133,7 @@
                     <a:lstStyle/>
                     <a:p>
                       <a:pPr>
-                        <a:defRPr sz="1000">
+                        <a:defRPr sz="900">
                           <a:solidFill>
                             <a:srgbClr val="0B1B2D"/>
                           </a:solidFill>
@@ -16175,14 +16151,14 @@
                   </a:tcPr>
                 </a:tc>
               </a:tr>
-              <a:tr h="457200">
+              <a:tr h="411480">
                 <a:tc>
                   <a:txBody>
                     <a:bodyPr/>
                     <a:lstStyle/>
                     <a:p>
                       <a:pPr>
-                        <a:defRPr sz="1000">
+                        <a:defRPr sz="900">
                           <a:solidFill>
                             <a:srgbClr val="0B1B2D"/>
                           </a:solidFill>
@@ -16205,7 +16181,7 @@
                     <a:lstStyle/>
                     <a:p>
                       <a:pPr>
-                        <a:defRPr sz="1000">
+                        <a:defRPr sz="900">
                           <a:solidFill>
                             <a:srgbClr val="0B1B2D"/>
                           </a:solidFill>
@@ -16228,7 +16204,7 @@
                     <a:lstStyle/>
                     <a:p>
                       <a:pPr>
-                        <a:defRPr sz="1000">
+                        <a:defRPr sz="900">
                           <a:solidFill>
                             <a:srgbClr val="0B1B2D"/>
                           </a:solidFill>
@@ -16246,14 +16222,14 @@
                   </a:tcPr>
                 </a:tc>
               </a:tr>
-              <a:tr h="457200">
+              <a:tr h="411480">
                 <a:tc>
                   <a:txBody>
                     <a:bodyPr/>
                     <a:lstStyle/>
                     <a:p>
                       <a:pPr>
-                        <a:defRPr sz="1000">
+                        <a:defRPr sz="900">
                           <a:solidFill>
                             <a:srgbClr val="0B1B2D"/>
                           </a:solidFill>
@@ -16276,7 +16252,7 @@
                     <a:lstStyle/>
                     <a:p>
                       <a:pPr>
-                        <a:defRPr sz="1000">
+                        <a:defRPr sz="900">
                           <a:solidFill>
                             <a:srgbClr val="0B1B2D"/>
                           </a:solidFill>
@@ -16299,7 +16275,7 @@
                     <a:lstStyle/>
                     <a:p>
                       <a:pPr>
-                        <a:defRPr sz="1000">
+                        <a:defRPr sz="900">
                           <a:solidFill>
                             <a:srgbClr val="0B1B2D"/>
                           </a:solidFill>
@@ -17874,7 +17850,7 @@
         </p:nvGraphicFramePr>
         <p:xfrm>
           <a:off x="731520" y="1828800"/>
-          <a:ext cx="5120640" cy="2743200"/>
+          <a:ext cx="5120640" cy="2468880"/>
         </p:xfrm>
         <a:graphic>
           <a:graphicData uri="http://schemas.openxmlformats.org/drawingml/2006/table">
@@ -17887,14 +17863,14 @@
                 <a:gridCol w="1706880"/>
                 <a:gridCol w="1706880"/>
               </a:tblGrid>
-              <a:tr h="457200">
+              <a:tr h="411480">
                 <a:tc>
                   <a:txBody>
                     <a:bodyPr/>
                     <a:lstStyle/>
                     <a:p>
                       <a:pPr>
-                        <a:defRPr b="1" sz="1100">
+                        <a:defRPr b="1" sz="1000">
                           <a:solidFill>
                             <a:srgbClr val="FFFFFF"/>
                           </a:solidFill>
@@ -17917,7 +17893,7 @@
                     <a:lstStyle/>
                     <a:p>
                       <a:pPr>
-                        <a:defRPr b="1" sz="1100">
+                        <a:defRPr b="1" sz="1000">
                           <a:solidFill>
                             <a:srgbClr val="FFFFFF"/>
                           </a:solidFill>
@@ -17940,7 +17916,7 @@
                     <a:lstStyle/>
                     <a:p>
                       <a:pPr>
-                        <a:defRPr b="1" sz="1100">
+                        <a:defRPr b="1" sz="1000">
                           <a:solidFill>
                             <a:srgbClr val="FFFFFF"/>
                           </a:solidFill>
@@ -17958,14 +17934,14 @@
                   </a:tcPr>
                 </a:tc>
               </a:tr>
-              <a:tr h="457200">
+              <a:tr h="411480">
                 <a:tc>
                   <a:txBody>
                     <a:bodyPr/>
                     <a:lstStyle/>
                     <a:p>
                       <a:pPr>
-                        <a:defRPr sz="1000">
+                        <a:defRPr sz="900">
                           <a:solidFill>
                             <a:srgbClr val="0B1B2D"/>
                           </a:solidFill>
@@ -17988,7 +17964,7 @@
                     <a:lstStyle/>
                     <a:p>
                       <a:pPr>
-                        <a:defRPr sz="1000">
+                        <a:defRPr sz="900">
                           <a:solidFill>
                             <a:srgbClr val="0B1B2D"/>
                           </a:solidFill>
@@ -18011,7 +17987,7 @@
                     <a:lstStyle/>
                     <a:p>
                       <a:pPr>
-                        <a:defRPr sz="1000">
+                        <a:defRPr sz="900">
                           <a:solidFill>
                             <a:srgbClr val="0B1B2D"/>
                           </a:solidFill>
@@ -18029,14 +18005,14 @@
                   </a:tcPr>
                 </a:tc>
               </a:tr>
-              <a:tr h="457200">
+              <a:tr h="411480">
                 <a:tc>
                   <a:txBody>
                     <a:bodyPr/>
                     <a:lstStyle/>
                     <a:p>
                       <a:pPr>
-                        <a:defRPr sz="1000">
+                        <a:defRPr sz="900">
                           <a:solidFill>
                             <a:srgbClr val="0B1B2D"/>
                           </a:solidFill>
@@ -18059,7 +18035,7 @@
                     <a:lstStyle/>
                     <a:p>
                       <a:pPr>
-                        <a:defRPr sz="1000">
+                        <a:defRPr sz="900">
                           <a:solidFill>
                             <a:srgbClr val="0B1B2D"/>
                           </a:solidFill>
@@ -18082,7 +18058,7 @@
                     <a:lstStyle/>
                     <a:p>
                       <a:pPr>
-                        <a:defRPr sz="1000">
+                        <a:defRPr sz="900">
                           <a:solidFill>
                             <a:srgbClr val="0B1B2D"/>
                           </a:solidFill>
@@ -18100,14 +18076,14 @@
                   </a:tcPr>
                 </a:tc>
               </a:tr>
-              <a:tr h="457200">
+              <a:tr h="411480">
                 <a:tc>
                   <a:txBody>
                     <a:bodyPr/>
                     <a:lstStyle/>
                     <a:p>
                       <a:pPr>
-                        <a:defRPr sz="1000">
+                        <a:defRPr sz="900">
                           <a:solidFill>
                             <a:srgbClr val="0B1B2D"/>
                           </a:solidFill>
@@ -18130,7 +18106,7 @@
                     <a:lstStyle/>
                     <a:p>
                       <a:pPr>
-                        <a:defRPr sz="1000">
+                        <a:defRPr sz="900">
                           <a:solidFill>
                             <a:srgbClr val="0B1B2D"/>
                           </a:solidFill>
@@ -18153,7 +18129,7 @@
                     <a:lstStyle/>
                     <a:p>
                       <a:pPr>
-                        <a:defRPr sz="1000">
+                        <a:defRPr sz="900">
                           <a:solidFill>
                             <a:srgbClr val="0B1B2D"/>
                           </a:solidFill>
@@ -18171,14 +18147,14 @@
                   </a:tcPr>
                 </a:tc>
               </a:tr>
-              <a:tr h="457200">
+              <a:tr h="411480">
                 <a:tc>
                   <a:txBody>
                     <a:bodyPr/>
                     <a:lstStyle/>
                     <a:p>
                       <a:pPr>
-                        <a:defRPr sz="1000">
+                        <a:defRPr sz="900">
                           <a:solidFill>
                             <a:srgbClr val="0B1B2D"/>
                           </a:solidFill>
@@ -18201,7 +18177,7 @@
                     <a:lstStyle/>
                     <a:p>
                       <a:pPr>
-                        <a:defRPr sz="1000">
+                        <a:defRPr sz="900">
                           <a:solidFill>
                             <a:srgbClr val="0B1B2D"/>
                           </a:solidFill>
@@ -18224,7 +18200,7 @@
                     <a:lstStyle/>
                     <a:p>
                       <a:pPr>
-                        <a:defRPr sz="1000">
+                        <a:defRPr sz="900">
                           <a:solidFill>
                             <a:srgbClr val="0B1B2D"/>
                           </a:solidFill>
@@ -18242,14 +18218,14 @@
                   </a:tcPr>
                 </a:tc>
               </a:tr>
-              <a:tr h="457200">
+              <a:tr h="411480">
                 <a:tc>
                   <a:txBody>
                     <a:bodyPr/>
                     <a:lstStyle/>
                     <a:p>
                       <a:pPr>
-                        <a:defRPr sz="1000">
+                        <a:defRPr sz="900">
                           <a:solidFill>
                             <a:srgbClr val="0B1B2D"/>
                           </a:solidFill>
@@ -18272,7 +18248,7 @@
                     <a:lstStyle/>
                     <a:p>
                       <a:pPr>
-                        <a:defRPr sz="1000">
+                        <a:defRPr sz="900">
                           <a:solidFill>
                             <a:srgbClr val="0B1B2D"/>
                           </a:solidFill>
@@ -18295,7 +18271,7 @@
                     <a:lstStyle/>
                     <a:p>
                       <a:pPr>
-                        <a:defRPr sz="1000">
+                        <a:defRPr sz="900">
                           <a:solidFill>
                             <a:srgbClr val="0B1B2D"/>
                           </a:solidFill>
